--- a/examples/cnpre.pptx
+++ b/examples/cnpre.pptx
@@ -22,7 +22,6 @@
     <p:sldId id="270" r:id="rId16"/>
     <p:sldId id="271" r:id="rId17"/>
     <p:sldId id="272" r:id="rId18"/>
-    <p:sldId id="273" r:id="rId19"/>
   </p:sldIdLst>
   <p:sldSz cx="9144000" cy="5143500" type="screen16x9"/>
   <p:notesSz cx="6858000" cy="9144000"/>
@@ -6539,78 +6538,6 @@
             </a:pPr>
             <a:r>
               <a:rPr/>
-              <a:t>表</a:t>
-            </a:r>
-          </a:p>
-        </p:txBody>
-      </p:sp>
-      <p:sp>
-        <p:nvSpPr>
-          <p:cNvPr id="3" name="Content Placeholder 2"/>
-          <p:cNvSpPr>
-            <a:spLocks noGrp="1"/>
-          </p:cNvSpPr>
-          <p:nvPr>
-            <p:ph idx="1"/>
-          </p:nvPr>
-        </p:nvSpPr>
-        <p:spPr/>
-        <p:txBody>
-          <a:bodyPr/>
-          <a:lstStyle/>
-          <a:p>
-            <a:pPr lvl="0" indent="0" marL="0">
-              <a:buNone/>
-            </a:pPr>
-            <a:r>
-              <a:rPr/>
-              <a:t>引用一下 表 1 (a)．</a:t>
-            </a:r>
-          </a:p>
-        </p:txBody>
-      </p:sp>
-    </p:spTree>
-  </p:cSld>
-</p:sld>
-</file>
-
-<file path=ppt/slides/slide12.xml><?xml version="1.0" encoding="utf-8"?>
-<p:sld xmlns:a="http://schemas.openxmlformats.org/drawingml/2006/main" xmlns:r="http://schemas.openxmlformats.org/officeDocument/2006/relationships" xmlns:p="http://schemas.openxmlformats.org/presentationml/2006/main">
-  <p:cSld>
-    <p:spTree>
-      <p:nvGrpSpPr>
-        <p:cNvPr id="1" name=""/>
-        <p:cNvGrpSpPr/>
-        <p:nvPr/>
-      </p:nvGrpSpPr>
-      <p:grpSpPr>
-        <a:xfrm>
-          <a:off x="0" y="0"/>
-          <a:ext cx="0" cy="0"/>
-          <a:chOff x="0" y="0"/>
-          <a:chExt cx="0" cy="0"/>
-        </a:xfrm>
-      </p:grpSpPr>
-      <p:sp>
-        <p:nvSpPr>
-          <p:cNvPr id="2" name="Title 1"/>
-          <p:cNvSpPr>
-            <a:spLocks noGrp="1"/>
-          </p:cNvSpPr>
-          <p:nvPr>
-            <p:ph type="title"/>
-          </p:nvPr>
-        </p:nvSpPr>
-        <p:spPr/>
-        <p:txBody>
-          <a:bodyPr/>
-          <a:lstStyle/>
-          <a:p>
-            <a:pPr lvl="0" indent="0" marL="0">
-              <a:buNone/>
-            </a:pPr>
-            <a:r>
-              <a:rPr/>
               <a:t>图</a:t>
             </a:r>
           </a:p>
@@ -6681,6 +6608,53 @@
 </p:sld>
 </file>
 
+<file path=ppt/slides/slide12.xml><?xml version="1.0" encoding="utf-8"?>
+<p:sld xmlns:a="http://schemas.openxmlformats.org/drawingml/2006/main" xmlns:r="http://schemas.openxmlformats.org/officeDocument/2006/relationships" xmlns:p="http://schemas.openxmlformats.org/presentationml/2006/main">
+  <p:cSld>
+    <p:spTree>
+      <p:nvGrpSpPr>
+        <p:cNvPr id="1" name=""/>
+        <p:cNvGrpSpPr/>
+        <p:nvPr/>
+      </p:nvGrpSpPr>
+      <p:grpSpPr>
+        <a:xfrm>
+          <a:off x="0" y="0"/>
+          <a:ext cx="0" cy="0"/>
+          <a:chOff x="0" y="0"/>
+          <a:chExt cx="0" cy="0"/>
+        </a:xfrm>
+      </p:grpSpPr>
+      <p:sp>
+        <p:nvSpPr>
+          <p:cNvPr id="3" name="Content Placeholder 2"/>
+          <p:cNvSpPr>
+            <a:spLocks noGrp="1"/>
+          </p:cNvSpPr>
+          <p:nvPr>
+            <p:ph idx="1"/>
+          </p:nvPr>
+        </p:nvSpPr>
+        <p:spPr/>
+        <p:txBody>
+          <a:bodyPr/>
+          <a:lstStyle/>
+          <a:p>
+            <a:pPr lvl="0" indent="0" marL="0">
+              <a:buNone/>
+            </a:pPr>
+            <a:r>
+              <a:rPr/>
+              <a:t>引用一下 图 1．</a:t>
+            </a:r>
+          </a:p>
+        </p:txBody>
+      </p:sp>
+    </p:spTree>
+  </p:cSld>
+</p:sld>
+</file>
+
 <file path=ppt/slides/slide13.xml><?xml version="1.0" encoding="utf-8"?>
 <p:sld xmlns:a="http://schemas.openxmlformats.org/drawingml/2006/main" xmlns:r="http://schemas.openxmlformats.org/officeDocument/2006/relationships" xmlns:p="http://schemas.openxmlformats.org/presentationml/2006/main">
   <p:cSld>
@@ -6700,6 +6674,31 @@
       </p:grpSpPr>
       <p:sp>
         <p:nvSpPr>
+          <p:cNvPr id="2" name="Title 1"/>
+          <p:cNvSpPr>
+            <a:spLocks noGrp="1"/>
+          </p:cNvSpPr>
+          <p:nvPr>
+            <p:ph type="title"/>
+          </p:nvPr>
+        </p:nvSpPr>
+        <p:spPr/>
+        <p:txBody>
+          <a:bodyPr/>
+          <a:lstStyle/>
+          <a:p>
+            <a:pPr lvl="0" indent="0" marL="0">
+              <a:buNone/>
+            </a:pPr>
+            <a:r>
+              <a:rPr/>
+              <a:t>计算图</a:t>
+            </a:r>
+          </a:p>
+        </p:txBody>
+      </p:sp>
+      <p:sp>
+        <p:nvSpPr>
           <p:cNvPr id="3" name="Content Placeholder 2"/>
           <p:cNvSpPr>
             <a:spLocks noGrp="1"/>
@@ -6718,7 +6717,26 @@
             </a:pPr>
             <a:r>
               <a:rPr/>
-              <a:t>引用一下 图 1．</a:t>
+              <a:t>Beamer format temporarily disabled due to </a:t>
+            </a:r>
+            <a:r>
+              <a:rPr>
+                <a:hlinkClick r:id="rId2"/>
+              </a:rPr>
+              <a:t>Quarto Issue #13372</a:t>
+            </a:r>
+            <a:r>
+              <a:rPr/>
+              <a:t>.</a:t>
+            </a:r>
+          </a:p>
+          <a:p>
+            <a:pPr lvl="0" indent="0" marL="0">
+              <a:buNone/>
+            </a:pPr>
+            <a:r>
+              <a:rPr/>
+              <a:t>复杂的并列效果．（图 2, 图 2 (a), 图 2 (b)）</a:t>
             </a:r>
           </a:p>
         </p:txBody>
@@ -6765,32 +6783,7 @@
             </a:pPr>
             <a:r>
               <a:rPr/>
-              <a:t>计算图</a:t>
-            </a:r>
-          </a:p>
-        </p:txBody>
-      </p:sp>
-      <p:sp>
-        <p:nvSpPr>
-          <p:cNvPr id="3" name="Content Placeholder 2"/>
-          <p:cNvSpPr>
-            <a:spLocks noGrp="1"/>
-          </p:cNvSpPr>
-          <p:nvPr>
-            <p:ph idx="1"/>
-          </p:nvPr>
-        </p:nvSpPr>
-        <p:spPr/>
-        <p:txBody>
-          <a:bodyPr/>
-          <a:lstStyle/>
-          <a:p>
-            <a:pPr lvl="0" indent="0" marL="0">
-              <a:buNone/>
-            </a:pPr>
-            <a:r>
-              <a:rPr/>
-              <a:t>复杂的并列效果．（图 2, 图 2 (a), 图 2 (b)）</a:t>
+              <a:t>TikZ</a:t>
             </a:r>
           </a:p>
         </p:txBody>
@@ -6827,7 +6820,12 @@
             <p:ph type="title"/>
           </p:nvPr>
         </p:nvSpPr>
-        <p:spPr/>
+        <p:spPr>
+          <a:xfrm>
+            <a:off x="508001" y="2025651"/>
+            <a:ext cx="6447501" cy="1369936"/>
+          </a:xfrm>
+        </p:spPr>
         <p:txBody>
           <a:bodyPr/>
           <a:lstStyle/>
@@ -6837,7 +6835,7 @@
             </a:pPr>
             <a:r>
               <a:rPr/>
-              <a:t>TikZ</a:t>
+              <a:t>Subsection 2</a:t>
             </a:r>
           </a:p>
         </p:txBody>
@@ -6848,58 +6846,6 @@
 </file>
 
 <file path=ppt/slides/slide16.xml><?xml version="1.0" encoding="utf-8"?>
-<p:sld xmlns:a="http://schemas.openxmlformats.org/drawingml/2006/main" xmlns:r="http://schemas.openxmlformats.org/officeDocument/2006/relationships" xmlns:p="http://schemas.openxmlformats.org/presentationml/2006/main">
-  <p:cSld>
-    <p:spTree>
-      <p:nvGrpSpPr>
-        <p:cNvPr id="1" name=""/>
-        <p:cNvGrpSpPr/>
-        <p:nvPr/>
-      </p:nvGrpSpPr>
-      <p:grpSpPr>
-        <a:xfrm>
-          <a:off x="0" y="0"/>
-          <a:ext cx="0" cy="0"/>
-          <a:chOff x="0" y="0"/>
-          <a:chExt cx="0" cy="0"/>
-        </a:xfrm>
-      </p:grpSpPr>
-      <p:sp>
-        <p:nvSpPr>
-          <p:cNvPr id="2" name="Title 1"/>
-          <p:cNvSpPr>
-            <a:spLocks noGrp="1"/>
-          </p:cNvSpPr>
-          <p:nvPr>
-            <p:ph type="title"/>
-          </p:nvPr>
-        </p:nvSpPr>
-        <p:spPr>
-          <a:xfrm>
-            <a:off x="508001" y="2025651"/>
-            <a:ext cx="6447501" cy="1369936"/>
-          </a:xfrm>
-        </p:spPr>
-        <p:txBody>
-          <a:bodyPr/>
-          <a:lstStyle/>
-          <a:p>
-            <a:pPr lvl="0" indent="0" marL="0">
-              <a:buNone/>
-            </a:pPr>
-            <a:r>
-              <a:rPr/>
-              <a:t>Subsection 2</a:t>
-            </a:r>
-          </a:p>
-        </p:txBody>
-      </p:sp>
-    </p:spTree>
-  </p:cSld>
-</p:sld>
-</file>
-
-<file path=ppt/slides/slide17.xml><?xml version="1.0" encoding="utf-8"?>
 <p:sld xmlns:a="http://schemas.openxmlformats.org/drawingml/2006/main" xmlns:r="http://schemas.openxmlformats.org/officeDocument/2006/relationships" xmlns:p="http://schemas.openxmlformats.org/presentationml/2006/main">
   <p:cSld>
     <p:spTree>
@@ -7044,7 +6990,7 @@
                 </a:pPr>
                 <a:r>
                   <a:rPr i="1"/>
-                  <a:t>证</a:t>
+                  <a:t>证明</a:t>
                 </a:r>
                 <a:r>
                   <a:rPr/>
@@ -7144,7 +7090,7 @@
                 </a:pPr>
                 <a:r>
                   <a:rPr i="1"/>
-                  <a:t>证</a:t>
+                  <a:t>证明</a:t>
                 </a:r>
                 <a:r>
                   <a:rPr/>
@@ -7330,7 +7276,7 @@
 </p:sld>
 </file>
 
-<file path=ppt/slides/slide18.xml><?xml version="1.0" encoding="utf-8"?>
+<file path=ppt/slides/slide17.xml><?xml version="1.0" encoding="utf-8"?>
 <p:sld xmlns:a="http://schemas.openxmlformats.org/drawingml/2006/main" xmlns:r="http://schemas.openxmlformats.org/officeDocument/2006/relationships" xmlns:p="http://schemas.openxmlformats.org/presentationml/2006/main">
   <p:cSld>
     <p:spTree>

--- a/examples/cnpre.pptx
+++ b/examples/cnpre.pptx
@@ -6577,7 +6577,9 @@
         <p:nvSpPr>
           <p:cNvPr id="1" name="TextBox 3"/>
           <p:cNvSpPr txBox="1"/>
-          <p:nvPr/>
+          <p:nvPr>
+            <p:ph idx="1"/>
+          </p:nvPr>
         </p:nvSpPr>
         <p:spPr>
           <a:xfrm>
@@ -6958,19 +6960,21 @@
                           </m:r>
                         </m:e>
                       </m:nary>
-                      <m:d>
-                        <m:dPr>
-                          <m:begChr m:val="("/>
-                          <m:sepChr m:val=""/>
-                          <m:endChr m:val=")"/>
-                          <m:grow/>
-                        </m:dPr>
-                        <m:e>
-                          <m:r>
-                            <m:t>d</m:t>
-                          </m:r>
-                        </m:e>
-                      </m:d>
+                      <m:r>
+                        <m:rPr>
+                          <m:sty m:val="p"/>
+                        </m:rPr>
+                        <m:t>(</m:t>
+                      </m:r>
+                      <m:r>
+                        <m:t>d</m:t>
+                      </m:r>
+                      <m:r>
+                        <m:rPr>
+                          <m:sty m:val="p"/>
+                        </m:rPr>
+                        <m:t>)</m:t>
+                      </m:r>
                       <m:r>
                         <m:rPr>
                           <m:sty m:val="p"/>
@@ -7039,47 +7043,51 @@
                           </m:r>
                         </m:e>
                       </m:nary>
-                      <m:d>
-                        <m:dPr>
-                          <m:begChr m:val="("/>
-                          <m:sepChr m:val=""/>
-                          <m:endChr m:val=")"/>
-                          <m:grow/>
-                        </m:dPr>
-                        <m:e>
-                          <m:r>
-                            <m:t>d</m:t>
-                          </m:r>
-                        </m:e>
-                      </m:d>
+                      <m:r>
+                        <m:rPr>
+                          <m:sty m:val="p"/>
+                        </m:rPr>
+                        <m:t>(</m:t>
+                      </m:r>
+                      <m:r>
+                        <m:t>d</m:t>
+                      </m:r>
+                      <m:r>
+                        <m:rPr>
+                          <m:sty m:val="p"/>
+                        </m:rPr>
+                        <m:t>)</m:t>
+                      </m:r>
                       <m:r>
                         <m:rPr>
                           <m:sty m:val="p"/>
                         </m:rPr>
                         <m:t>=</m:t>
                       </m:r>
-                      <m:d>
-                        <m:dPr>
-                          <m:begChr m:val="["/>
-                          <m:sepChr m:val=""/>
-                          <m:endChr m:val="]"/>
-                          <m:grow/>
-                        </m:dPr>
-                        <m:e>
-                          <m:r>
-                            <m:t>n</m:t>
-                          </m:r>
-                          <m:r>
-                            <m:rPr>
-                              <m:sty m:val="p"/>
-                            </m:rPr>
-                            <m:t>=</m:t>
-                          </m:r>
-                          <m:r>
-                            <m:t>1</m:t>
-                          </m:r>
-                        </m:e>
-                      </m:d>
+                      <m:r>
+                        <m:rPr>
+                          <m:sty m:val="p"/>
+                        </m:rPr>
+                        <m:t>[</m:t>
+                      </m:r>
+                      <m:r>
+                        <m:t>n</m:t>
+                      </m:r>
+                      <m:r>
+                        <m:rPr>
+                          <m:sty m:val="p"/>
+                        </m:rPr>
+                        <m:t>=</m:t>
+                      </m:r>
+                      <m:r>
+                        <m:t>1</m:t>
+                      </m:r>
+                      <m:r>
+                        <m:rPr>
+                          <m:sty m:val="p"/>
+                        </m:rPr>
+                        <m:t>]</m:t>
+                      </m:r>
                     </m:oMath>
                   </m:oMathPara>
                 </a14:m>
@@ -7264,7 +7272,7 @@
                 </a:r>
                 <a:r>
                   <a:rPr/>
-                  <a:t>, 卷 3, 期 1, 页 71–86.</a:t>
+                  <a:t>, 卷 3, 期 1, 页 71～86.</a:t>
                 </a:r>
               </a:p>
             </p:txBody>

--- a/examples/cnpre.pptx
+++ b/examples/cnpre.pptx
@@ -6025,7 +6025,7 @@
             </a:pPr>
             <a:r>
               <a:rPr/>
-              <a:t>SunQuarTeX Example - cnpre</a:t>
+              <a:t>中文幻灯片示例</a:t>
             </a:r>
           </a:p>
         </p:txBody>
@@ -6055,7 +6055,7 @@
             </a:pPr>
             <a:r>
               <a:rPr/>
-              <a:t>这是副标题</a:t>
+              <a:t>SunQuarTeX Examples</a:t>
             </a:r>
             <a:br/>
             <a:br/>

--- a/examples/cnpre.pptx
+++ b/examples/cnpre.pptx
@@ -7549,56 +7549,88 @@
           </a:p>
         </p:txBody>
       </p:sp>
-      <p:sp>
-        <p:nvSpPr>
-          <p:cNvPr id="3" name="Content Placeholder 2"/>
-          <p:cNvSpPr>
-            <a:spLocks noGrp="1"/>
-          </p:cNvSpPr>
-          <p:nvPr>
-            <p:ph idx="1"/>
-          </p:nvPr>
-        </p:nvSpPr>
-        <p:spPr/>
-        <p:txBody>
-          <a:bodyPr/>
-          <a:lstStyle/>
-          <a:p>
-            <a:pPr lvl="0" indent="0" marL="0">
-              <a:buNone/>
-            </a:pPr>
-            <a:r>
-              <a:rPr/>
-              <a:t>长长长</a:t>
-            </a:r>
-            <a:r>
-              <a:rPr b="1"/>
-              <a:t>长长 long 长长</a:t>
-            </a:r>
-            <a:r>
-              <a:rPr/>
-              <a:t>长长长长长</a:t>
-            </a:r>
-            <a:r>
-              <a:rPr i="1"/>
-              <a:t>长长 long 长长</a:t>
-            </a:r>
-            <a:r>
-              <a:rPr/>
-              <a:t>长长长长长长长长长长长长长长长长长长长长长长长长长长长句子．</a:t>
-            </a:r>
-          </a:p>
-          <a:p>
-            <a:pPr lvl="0" indent="0" marL="0">
-              <a:buNone/>
-            </a:pPr>
-            <a:r>
-              <a:rPr/>
-              <a:t>长长长长长长长长长长长长长长长长长长长长长长长长长长长长长长长长长长长长长长长长长长长段落．</a:t>
-            </a:r>
-          </a:p>
-        </p:txBody>
-      </p:sp>
+      <mc:AlternateContent xmlns:mc="http://schemas.openxmlformats.org/markup-compatibility/2006">
+        <mc:Choice xmlns:a14="http://schemas.microsoft.com/office/drawing/2010/main" Requires="a14">
+          <p:sp>
+            <p:nvSpPr>
+              <p:cNvPr id="3" name="Content Placeholder 2"/>
+              <p:cNvSpPr>
+                <a:spLocks noGrp="1"/>
+              </p:cNvSpPr>
+              <p:nvPr>
+                <p:ph idx="1"/>
+              </p:nvPr>
+            </p:nvSpPr>
+            <p:spPr/>
+            <p:txBody>
+              <a:bodyPr/>
+              <a:lstStyle/>
+              <a:p>
+                <a:pPr lvl="0" indent="0" marL="0">
+                  <a:buNone/>
+                </a:pPr>
+                <a:r>
+                  <a:rPr/>
+                  <a:t>长长长</a:t>
+                </a:r>
+                <a:r>
+                  <a:rPr b="1"/>
+                  <a:t>长长 long 长长</a:t>
+                </a:r>
+                <a:r>
+                  <a:rPr/>
+                  <a:t>长长长长长</a:t>
+                </a:r>
+                <a:r>
+                  <a:rPr i="1"/>
+                  <a:t>长长 long 长长</a:t>
+                </a:r>
+                <a:r>
+                  <a:rPr/>
+                  <a:t>长长长长长长长长长长长长长长长长长长长长长长长长长长长句子．</a:t>
+                </a:r>
+              </a:p>
+              <a:p>
+                <a:pPr lvl="0" indent="0" marL="0">
+                  <a:buNone/>
+                </a:pPr>
+                <a:r>
+                  <a:rPr/>
+                  <a:t>长长长 </a:t>
+                </a:r>
+                <a14:m>
+                  <m:oMath xmlns:m="http://schemas.openxmlformats.org/officeDocument/2006/math">
+                    <m:r>
+                      <m:t>e</m:t>
+                    </m:r>
+                  </m:oMath>
+                </a14:m>
+                <a:r>
+                  <a:rPr/>
+                  <a:t> 长长长 </a:t>
+                </a:r>
+                <a14:m>
+                  <m:oMath xmlns:m="http://schemas.openxmlformats.org/officeDocument/2006/math">
+                    <m:r>
+                      <m:t>f</m:t>
+                    </m:r>
+                    <m:r>
+                      <m:t>g</m:t>
+                    </m:r>
+                    <m:r>
+                      <m:t>e</m:t>
+                    </m:r>
+                  </m:oMath>
+                </a14:m>
+                <a:r>
+                  <a:rPr/>
+                  <a:t> 长长长长长长长长长长长长长长长长长长长长长长长长长段落．</a:t>
+                </a:r>
+              </a:p>
+            </p:txBody>
+          </p:sp>
+        </mc:Choice>
+      </mc:AlternateContent>
     </p:spTree>
   </p:cSld>
 </p:sld>
